--- a/reports/Aurora_Amazon_Plush_Ranking_Analysis.pptx
+++ b/reports/Aurora_Amazon_Plush_Ranking_Analysis.pptx
@@ -2326,7 +2326,7 @@
                 <a:ea typeface="Pretendard" pitchFamily="34" charset="-122"/>
                 <a:cs typeface="Pretendard" pitchFamily="34" charset="-120"/>
               </a:rPr>
-              <a:t>작성 : 상품기획팀   |   데이터 기준일 : 2026. 08. 30. (금일 조회 기준)   |   랭킹은 시간·지역에 따라 변동</a:t>
+              <a:t>작성 : 상품기획팀   |   데이터 기준일 : 2026. 09. 22. (금일 조회 기준)   |   랭킹은 시간·지역에 따라 변동</a:t>
             </a:r>
             <a:endParaRPr lang="en-US" sz="1500" dirty="0"/>
           </a:p>
@@ -3049,7 +3049,7 @@
                 <a:ea typeface="Pretendard" pitchFamily="34" charset="-122"/>
                 <a:cs typeface="Pretendard" pitchFamily="34" charset="-120"/>
               </a:rPr>
-              <a:t>2026. 08. 30. 기준   |   2</a:t>
+              <a:t>2026. 09. 22. 기준   |   2</a:t>
             </a:r>
             <a:endParaRPr lang="en-US" sz="1300" dirty="0"/>
           </a:p>
@@ -3908,7 +3908,7 @@
                 <a:ea typeface="Pretendard" pitchFamily="34" charset="-122"/>
                 <a:cs typeface="Pretendard" pitchFamily="34" charset="-120"/>
               </a:rPr>
-              <a:t>2026. 08. 30. 기준   |   3</a:t>
+              <a:t>2026. 09. 22. 기준   |   3</a:t>
             </a:r>
             <a:endParaRPr lang="en-US" sz="1300" dirty="0"/>
           </a:p>
@@ -5071,7 +5071,7 @@
                 <a:ea typeface="Pretendard" pitchFamily="34" charset="-122"/>
                 <a:cs typeface="Pretendard" pitchFamily="34" charset="-120"/>
               </a:rPr>
-              <a:t>2026. 08. 30. 기준   |   4</a:t>
+              <a:t>2026. 09. 22. 기준   |   4</a:t>
             </a:r>
             <a:endParaRPr lang="en-US" sz="1300" dirty="0"/>
           </a:p>
@@ -6302,7 +6302,7 @@
                 <a:ea typeface="Pretendard" pitchFamily="34" charset="-122"/>
                 <a:cs typeface="Pretendard" pitchFamily="34" charset="-120"/>
               </a:rPr>
-              <a:t>2026. 08. 30. 기준   |   5</a:t>
+              <a:t>2026. 09. 22. 기준   |   5</a:t>
             </a:r>
             <a:endParaRPr lang="en-US" sz="1300" dirty="0"/>
           </a:p>
@@ -7208,7 +7208,7 @@
                 <a:ea typeface="Pretendard" pitchFamily="34" charset="-122"/>
                 <a:cs typeface="Pretendard" pitchFamily="34" charset="-120"/>
               </a:rPr>
-              <a:t>2026. 08. 30. 기준   |   6</a:t>
+              <a:t>2026. 09. 22. 기준   |   6</a:t>
             </a:r>
             <a:endParaRPr lang="en-US" sz="1300" dirty="0"/>
           </a:p>
@@ -7679,7 +7679,7 @@
                 <a:ea typeface="Pretendard" pitchFamily="34" charset="-122"/>
                 <a:cs typeface="Pretendard" pitchFamily="34" charset="-120"/>
               </a:rPr>
-              <a:t>2026. 08. 30. 기준   |   7</a:t>
+              <a:t>2026. 09. 22. 기준   |   7</a:t>
             </a:r>
             <a:endParaRPr lang="en-US" sz="1300" dirty="0"/>
           </a:p>
@@ -9167,7 +9167,7 @@
                 <a:ea typeface="Pretendard" pitchFamily="34" charset="-122"/>
                 <a:cs typeface="Pretendard" pitchFamily="34" charset="-120"/>
               </a:rPr>
-              <a:t>2026. 08. 30. 기준   |   8</a:t>
+              <a:t>2026. 09. 22. 기준   |   8</a:t>
             </a:r>
             <a:endParaRPr lang="en-US" sz="1300" dirty="0"/>
           </a:p>
@@ -9909,7 +9909,7 @@
                 <a:ea typeface="Pretendard" pitchFamily="34" charset="-122"/>
                 <a:cs typeface="Pretendard" pitchFamily="34" charset="-120"/>
               </a:rPr>
-              <a:t>※ 본 자료의 데이터 기준일은 2026. 08. 30. (금일 조회 기준)입니다. Amazon 랭킹은 접속 시점 · 지역 · 계정 · 재고에 따라 변동되므로, 재인용 시 조회 일시를 반드시 함께 기재하십시오.</a:t>
+              <a:t>※ 본 자료의 데이터 기준일은 2026. 09. 22. (금일 조회 기준)입니다. Amazon 랭킹은 접속 시점 · 지역 · 계정 · 재고에 따라 변동되므로, 재인용 시 조회 일시를 반드시 함께 기재하십시오.</a:t>
             </a:r>
             <a:endParaRPr lang="en-US" sz="1300" dirty="0"/>
           </a:p>
@@ -9948,7 +9948,7 @@
                 <a:ea typeface="Pretendard" pitchFamily="34" charset="-122"/>
                 <a:cs typeface="Pretendard" pitchFamily="34" charset="-120"/>
               </a:rPr>
-              <a:t>2026. 08. 30. 기준   |   9</a:t>
+              <a:t>2026. 09. 22. 기준   |   9</a:t>
             </a:r>
             <a:endParaRPr lang="en-US" sz="1300" dirty="0"/>
           </a:p>

--- a/reports/Aurora_Amazon_Plush_Ranking_Analysis.pptx
+++ b/reports/Aurora_Amazon_Plush_Ranking_Analysis.pptx
@@ -2326,7 +2326,7 @@
                 <a:ea typeface="Pretendard" pitchFamily="34" charset="-122"/>
                 <a:cs typeface="Pretendard" pitchFamily="34" charset="-120"/>
               </a:rPr>
-              <a:t>작성 : 상품기획팀   |   데이터 기준일 : 2026. 09. 22. (금일 조회 기준)   |   랭킹은 시간·지역에 따라 변동</a:t>
+              <a:t>작성 : 상품기획팀   |   데이터 기준일 : 2026. 09. 30. (금일 조회 기준)   |   랭킹은 시간·지역에 따라 변동</a:t>
             </a:r>
             <a:endParaRPr lang="en-US" sz="1500" dirty="0"/>
           </a:p>
@@ -3049,7 +3049,7 @@
                 <a:ea typeface="Pretendard" pitchFamily="34" charset="-122"/>
                 <a:cs typeface="Pretendard" pitchFamily="34" charset="-120"/>
               </a:rPr>
-              <a:t>2026. 09. 22. 기준   |   2</a:t>
+              <a:t>2026. 09. 30. 기준   |   2</a:t>
             </a:r>
             <a:endParaRPr lang="en-US" sz="1300" dirty="0"/>
           </a:p>
@@ -3908,7 +3908,7 @@
                 <a:ea typeface="Pretendard" pitchFamily="34" charset="-122"/>
                 <a:cs typeface="Pretendard" pitchFamily="34" charset="-120"/>
               </a:rPr>
-              <a:t>2026. 09. 22. 기준   |   3</a:t>
+              <a:t>2026. 09. 30. 기준   |   3</a:t>
             </a:r>
             <a:endParaRPr lang="en-US" sz="1300" dirty="0"/>
           </a:p>
@@ -5071,7 +5071,7 @@
                 <a:ea typeface="Pretendard" pitchFamily="34" charset="-122"/>
                 <a:cs typeface="Pretendard" pitchFamily="34" charset="-120"/>
               </a:rPr>
-              <a:t>2026. 09. 22. 기준   |   4</a:t>
+              <a:t>2026. 09. 30. 기준   |   4</a:t>
             </a:r>
             <a:endParaRPr lang="en-US" sz="1300" dirty="0"/>
           </a:p>
@@ -6302,7 +6302,7 @@
                 <a:ea typeface="Pretendard" pitchFamily="34" charset="-122"/>
                 <a:cs typeface="Pretendard" pitchFamily="34" charset="-120"/>
               </a:rPr>
-              <a:t>2026. 09. 22. 기준   |   5</a:t>
+              <a:t>2026. 09. 30. 기준   |   5</a:t>
             </a:r>
             <a:endParaRPr lang="en-US" sz="1300" dirty="0"/>
           </a:p>
@@ -7208,7 +7208,7 @@
                 <a:ea typeface="Pretendard" pitchFamily="34" charset="-122"/>
                 <a:cs typeface="Pretendard" pitchFamily="34" charset="-120"/>
               </a:rPr>
-              <a:t>2026. 09. 22. 기준   |   6</a:t>
+              <a:t>2026. 09. 30. 기준   |   6</a:t>
             </a:r>
             <a:endParaRPr lang="en-US" sz="1300" dirty="0"/>
           </a:p>
@@ -7679,7 +7679,7 @@
                 <a:ea typeface="Pretendard" pitchFamily="34" charset="-122"/>
                 <a:cs typeface="Pretendard" pitchFamily="34" charset="-120"/>
               </a:rPr>
-              <a:t>2026. 09. 22. 기준   |   7</a:t>
+              <a:t>2026. 09. 30. 기준   |   7</a:t>
             </a:r>
             <a:endParaRPr lang="en-US" sz="1300" dirty="0"/>
           </a:p>
@@ -9167,7 +9167,7 @@
                 <a:ea typeface="Pretendard" pitchFamily="34" charset="-122"/>
                 <a:cs typeface="Pretendard" pitchFamily="34" charset="-120"/>
               </a:rPr>
-              <a:t>2026. 09. 22. 기준   |   8</a:t>
+              <a:t>2026. 09. 30. 기준   |   8</a:t>
             </a:r>
             <a:endParaRPr lang="en-US" sz="1300" dirty="0"/>
           </a:p>
@@ -9909,7 +9909,7 @@
                 <a:ea typeface="Pretendard" pitchFamily="34" charset="-122"/>
                 <a:cs typeface="Pretendard" pitchFamily="34" charset="-120"/>
               </a:rPr>
-              <a:t>※ 본 자료의 데이터 기준일은 2026. 09. 22. (금일 조회 기준)입니다. Amazon 랭킹은 접속 시점 · 지역 · 계정 · 재고에 따라 변동되므로, 재인용 시 조회 일시를 반드시 함께 기재하십시오.</a:t>
+              <a:t>※ 본 자료의 데이터 기준일은 2026. 09. 30. (금일 조회 기준)입니다. Amazon 랭킹은 접속 시점 · 지역 · 계정 · 재고에 따라 변동되므로, 재인용 시 조회 일시를 반드시 함께 기재하십시오.</a:t>
             </a:r>
             <a:endParaRPr lang="en-US" sz="1300" dirty="0"/>
           </a:p>
@@ -9948,7 +9948,7 @@
                 <a:ea typeface="Pretendard" pitchFamily="34" charset="-122"/>
                 <a:cs typeface="Pretendard" pitchFamily="34" charset="-120"/>
               </a:rPr>
-              <a:t>2026. 09. 22. 기준   |   9</a:t>
+              <a:t>2026. 09. 30. 기준   |   9</a:t>
             </a:r>
             <a:endParaRPr lang="en-US" sz="1300" dirty="0"/>
           </a:p>

--- a/reports/Aurora_Amazon_Plush_Ranking_Analysis.pptx
+++ b/reports/Aurora_Amazon_Plush_Ranking_Analysis.pptx
@@ -2326,7 +2326,7 @@
                 <a:ea typeface="Pretendard" pitchFamily="34" charset="-122"/>
                 <a:cs typeface="Pretendard" pitchFamily="34" charset="-120"/>
               </a:rPr>
-              <a:t>작성 : 상품기획팀   |   데이터 기준일 : 2026. 09. 30. (금일 조회 기준)   |   랭킹은 시간·지역에 따라 변동</a:t>
+              <a:t>작성 : 상품기획팀   |   데이터 기준일 : 2026. 10. 05. (금일 조회 기준)   |   랭킹은 시간·지역에 따라 변동</a:t>
             </a:r>
             <a:endParaRPr lang="en-US" sz="1500" dirty="0"/>
           </a:p>
@@ -3049,7 +3049,7 @@
                 <a:ea typeface="Pretendard" pitchFamily="34" charset="-122"/>
                 <a:cs typeface="Pretendard" pitchFamily="34" charset="-120"/>
               </a:rPr>
-              <a:t>2026. 09. 30. 기준   |   2</a:t>
+              <a:t>2026. 10. 05. 기준   |   2</a:t>
             </a:r>
             <a:endParaRPr lang="en-US" sz="1300" dirty="0"/>
           </a:p>
@@ -3908,7 +3908,7 @@
                 <a:ea typeface="Pretendard" pitchFamily="34" charset="-122"/>
                 <a:cs typeface="Pretendard" pitchFamily="34" charset="-120"/>
               </a:rPr>
-              <a:t>2026. 09. 30. 기준   |   3</a:t>
+              <a:t>2026. 10. 05. 기준   |   3</a:t>
             </a:r>
             <a:endParaRPr lang="en-US" sz="1300" dirty="0"/>
           </a:p>
@@ -5071,7 +5071,7 @@
                 <a:ea typeface="Pretendard" pitchFamily="34" charset="-122"/>
                 <a:cs typeface="Pretendard" pitchFamily="34" charset="-120"/>
               </a:rPr>
-              <a:t>2026. 09. 30. 기준   |   4</a:t>
+              <a:t>2026. 10. 05. 기준   |   4</a:t>
             </a:r>
             <a:endParaRPr lang="en-US" sz="1300" dirty="0"/>
           </a:p>
@@ -6302,7 +6302,7 @@
                 <a:ea typeface="Pretendard" pitchFamily="34" charset="-122"/>
                 <a:cs typeface="Pretendard" pitchFamily="34" charset="-120"/>
               </a:rPr>
-              <a:t>2026. 09. 30. 기준   |   5</a:t>
+              <a:t>2026. 10. 05. 기준   |   5</a:t>
             </a:r>
             <a:endParaRPr lang="en-US" sz="1300" dirty="0"/>
           </a:p>
@@ -7208,7 +7208,7 @@
                 <a:ea typeface="Pretendard" pitchFamily="34" charset="-122"/>
                 <a:cs typeface="Pretendard" pitchFamily="34" charset="-120"/>
               </a:rPr>
-              <a:t>2026. 09. 30. 기준   |   6</a:t>
+              <a:t>2026. 10. 05. 기준   |   6</a:t>
             </a:r>
             <a:endParaRPr lang="en-US" sz="1300" dirty="0"/>
           </a:p>
@@ -7679,7 +7679,7 @@
                 <a:ea typeface="Pretendard" pitchFamily="34" charset="-122"/>
                 <a:cs typeface="Pretendard" pitchFamily="34" charset="-120"/>
               </a:rPr>
-              <a:t>2026. 09. 30. 기준   |   7</a:t>
+              <a:t>2026. 10. 05. 기준   |   7</a:t>
             </a:r>
             <a:endParaRPr lang="en-US" sz="1300" dirty="0"/>
           </a:p>
@@ -9167,7 +9167,7 @@
                 <a:ea typeface="Pretendard" pitchFamily="34" charset="-122"/>
                 <a:cs typeface="Pretendard" pitchFamily="34" charset="-120"/>
               </a:rPr>
-              <a:t>2026. 09. 30. 기준   |   8</a:t>
+              <a:t>2026. 10. 05. 기준   |   8</a:t>
             </a:r>
             <a:endParaRPr lang="en-US" sz="1300" dirty="0"/>
           </a:p>
@@ -9909,7 +9909,7 @@
                 <a:ea typeface="Pretendard" pitchFamily="34" charset="-122"/>
                 <a:cs typeface="Pretendard" pitchFamily="34" charset="-120"/>
               </a:rPr>
-              <a:t>※ 본 자료의 데이터 기준일은 2026. 09. 30. (금일 조회 기준)입니다. Amazon 랭킹은 접속 시점 · 지역 · 계정 · 재고에 따라 변동되므로, 재인용 시 조회 일시를 반드시 함께 기재하십시오.</a:t>
+              <a:t>※ 본 자료의 데이터 기준일은 2026. 10. 05. (금일 조회 기준)입니다. Amazon 랭킹은 접속 시점 · 지역 · 계정 · 재고에 따라 변동되므로, 재인용 시 조회 일시를 반드시 함께 기재하십시오.</a:t>
             </a:r>
             <a:endParaRPr lang="en-US" sz="1300" dirty="0"/>
           </a:p>
@@ -9948,7 +9948,7 @@
                 <a:ea typeface="Pretendard" pitchFamily="34" charset="-122"/>
                 <a:cs typeface="Pretendard" pitchFamily="34" charset="-120"/>
               </a:rPr>
-              <a:t>2026. 09. 30. 기준   |   9</a:t>
+              <a:t>2026. 10. 05. 기준   |   9</a:t>
             </a:r>
             <a:endParaRPr lang="en-US" sz="1300" dirty="0"/>
           </a:p>
